--- a/docs/informativa/outputs/2026-05-30/deck_informativa_usa_2026-05-30.pptx
+++ b/docs/informativa/outputs/2026-05-30/deck_informativa_usa_2026-05-30.pptx
@@ -3453,16 +3453,40 @@
           </a:p>
         </p:txBody>
       </p:sp>
-      <p:sp>
-        <p:nvSpPr>
-          <p:cNvPr id="3" name="TextBox 2"/>
+      <p:pic>
+        <p:nvPicPr>
+          <p:cNvPr id="3" name="Picture 2" descr="L_USA_1_dotplot.png"/>
+          <p:cNvPicPr>
+            <a:picLocks noChangeAspect="1"/>
+          </p:cNvPicPr>
+          <p:nvPr/>
+        </p:nvPicPr>
+        <p:blipFill>
+          <a:blip r:embed="rId2"/>
+          <a:stretch>
+            <a:fillRect/>
+          </a:stretch>
+        </p:blipFill>
+        <p:spPr>
+          <a:xfrm>
+            <a:off x="365760" y="548640"/>
+            <a:ext cx="11457432" cy="6619567"/>
+          </a:xfrm>
+          <a:prstGeom prst="rect">
+            <a:avLst/>
+          </a:prstGeom>
+        </p:spPr>
+      </p:pic>
+      <p:sp>
+        <p:nvSpPr>
+          <p:cNvPr id="4" name="TextBox 3"/>
           <p:cNvSpPr txBox="1"/>
           <p:nvPr/>
         </p:nvSpPr>
         <p:spPr>
           <a:xfrm>
-            <a:off x="1828800" y="2560320"/>
-            <a:ext cx="8531352" cy="1828800"/>
+            <a:off x="365760" y="6537960"/>
+            <a:ext cx="11457432" cy="274320"/>
           </a:xfrm>
           <a:prstGeom prst="rect">
             <a:avLst/>
@@ -3475,14 +3499,14 @@
           </a:bodyPr>
           <a:lstStyle/>
           <a:p>
-            <a:pPr algn="ctr"/>
-            <a:r>
-              <a:rPr sz="2200" i="1">
+            <a:pPr algn="l"/>
+            <a:r>
+              <a:rPr sz="800" b="0" i="1">
                 <a:solidFill>
                   <a:srgbClr val="666666"/>
                 </a:solidFill>
               </a:rPr>
-              <a:t>En construcción · Sprint 1.2</a:t>
+              <a:t>Documento informativo con fines analíticos. No constituye recomendación de inversión.</a:t>
             </a:r>
           </a:p>
         </p:txBody>
@@ -3539,16 +3563,40 @@
           </a:p>
         </p:txBody>
       </p:sp>
-      <p:sp>
-        <p:nvSpPr>
-          <p:cNvPr id="3" name="TextBox 2"/>
+      <p:pic>
+        <p:nvPicPr>
+          <p:cNvPr id="3" name="Picture 2" descr="L_USA_2_path_fed.png"/>
+          <p:cNvPicPr>
+            <a:picLocks noChangeAspect="1"/>
+          </p:cNvPicPr>
+          <p:nvPr/>
+        </p:nvPicPr>
+        <p:blipFill>
+          <a:blip r:embed="rId2"/>
+          <a:stretch>
+            <a:fillRect/>
+          </a:stretch>
+        </p:blipFill>
+        <p:spPr>
+          <a:xfrm>
+            <a:off x="365760" y="548640"/>
+            <a:ext cx="11457432" cy="7522251"/>
+          </a:xfrm>
+          <a:prstGeom prst="rect">
+            <a:avLst/>
+          </a:prstGeom>
+        </p:spPr>
+      </p:pic>
+      <p:sp>
+        <p:nvSpPr>
+          <p:cNvPr id="4" name="TextBox 3"/>
           <p:cNvSpPr txBox="1"/>
           <p:nvPr/>
         </p:nvSpPr>
         <p:spPr>
           <a:xfrm>
-            <a:off x="1828800" y="2560320"/>
-            <a:ext cx="8531352" cy="1828800"/>
+            <a:off x="365760" y="6537960"/>
+            <a:ext cx="11457432" cy="274320"/>
           </a:xfrm>
           <a:prstGeom prst="rect">
             <a:avLst/>
@@ -3561,14 +3609,14 @@
           </a:bodyPr>
           <a:lstStyle/>
           <a:p>
-            <a:pPr algn="ctr"/>
-            <a:r>
-              <a:rPr sz="2200" i="1">
+            <a:pPr algn="l"/>
+            <a:r>
+              <a:rPr sz="800" b="0" i="1">
                 <a:solidFill>
                   <a:srgbClr val="666666"/>
                 </a:solidFill>
               </a:rPr>
-              <a:t>En construcción · Sprint 1.3</a:t>
+              <a:t>Documento informativo con fines analíticos. No constituye recomendación de inversión.</a:t>
             </a:r>
           </a:p>
         </p:txBody>
